--- a/catalog/samples/evidence_basis.pptx
+++ b/catalog/samples/evidence_basis.pptx
@@ -1122,7 +1122,7 @@
           </a:p>
           <a:p>
             <a:r>
-              <a:t>  "template_sha256": "31f8677268d32896ff992f79469f02bdcfa39564794ae7d8ab3db6417174147e"</a:t>
+              <a:t>  "template_sha256": "e49061c2764c4c756167af9fcff50cdb0363e1445a6b91c985126f727cf20c96"</a:t>
             </a:r>
           </a:p>
           <a:p>
